--- a/decks/geog-glaciers/geog-glaciers_ch6_people-and-ice.pptx
+++ b/decks/geog-glaciers/geog-glaciers_ch6_people-and-ice.pptx
@@ -126,30 +126,30 @@
   <p:extLst>
     <p:ext uri="{521415D9-36F7-43E2-AB2F-B90AF26B5E84}">
       <p14:sectionLst xmlns:p14="http://schemas.microsoft.com/office/powerpoint/2010/main">
-        <p14:section name="Opening" id="{eaf265df-4803-bfe3-5674-18c44eb9c67a}">
+        <p14:section name="Opening" id="{efd8ed1e-1c96-b758-bd62-ce557e3850f2}">
           <p14:sldIdLst>
             <p14:sldId id="256"/>
           </p14:sldIdLst>
         </p14:section>
-        <p14:section name="Gate" id="{06443064-cc70-f53b-ced7-2542e95adf9d}">
+        <p14:section name="Gate" id="{1c28f986-4501-c8b0-24ca-d771022f355c}">
           <p14:sldIdLst>
             <p14:sldId id="257"/>
             <p14:sldId id="258"/>
           </p14:sldIdLst>
         </p14:section>
-        <p14:section name="Pre-teach" id="{99860780-9358-c3f9-c095-20a1b2b141ba}">
+        <p14:section name="Pre-teach" id="{b9317d46-34be-4aa2-213a-7a39171da141}">
           <p14:sldIdLst>
             <p14:sldId id="259"/>
             <p14:sldId id="260"/>
           </p14:sldIdLst>
         </p14:section>
-        <p14:section name="Read-along" id="{ab59af58-3005-b08e-45e2-8ec872516a03}">
+        <p14:section name="Read-along" id="{c7bfe938-5359-d3ad-6073-342a32709243}">
           <p14:sldIdLst>
             <p14:sldId id="261"/>
             <p14:sldId id="262"/>
           </p14:sldIdLst>
         </p14:section>
-        <p14:section name="Teach" id="{858a04fb-6e0c-4b52-76ef-9d496346b891}">
+        <p14:section name="Teach" id="{bd3f7fba-c162-42c0-8410-e421c427e25a}">
           <p14:sldIdLst>
             <p14:sldId id="263"/>
             <p14:sldId id="264"/>
@@ -158,7 +158,7 @@
             <p14:sldId id="267"/>
           </p14:sldIdLst>
         </p14:section>
-        <p14:section name="Routes" id="{5cf0c7e2-a15d-0a4a-1d9a-810f4093bbf5}">
+        <p14:section name="Routes" id="{afcad0e7-75fe-0710-720d-9b1d63ed800a}">
           <p14:sldIdLst>
             <p14:sldId id="268"/>
             <p14:sldId id="269"/>
@@ -166,12 +166,12 @@
             <p14:sldId id="271"/>
           </p14:sldIdLst>
         </p14:section>
-        <p14:section name="Close" id="{6685fbf9-5d8b-4d5c-4f2a-98577ee97a5d}">
+        <p14:section name="Close" id="{0481e742-4a23-f373-ded6-0da168b20d54}">
           <p14:sldIdLst>
             <p14:sldId id="272"/>
           </p14:sldIdLst>
         </p14:section>
-        <p14:section name="Answers" id="{7c980c63-b0b0-1c62-1992-1f741c50fdb9}">
+        <p14:section name="Answers" id="{ab1e1a4b-ec7e-53f8-3b57-28b55c5c13e4}">
           <p14:sldIdLst>
             <p14:sldId id="273"/>
             <p14:sldId id="274"/>
